--- a/Student-Workspace-Web-App/project-presentation/Java_Full_Stack_Project_Review_2.pptx
+++ b/Student-Workspace-Web-App/project-presentation/Java_Full_Stack_Project_Review_2.pptx
@@ -219,7 +219,7 @@
           <a:p>
             <a:fld id="{F1DA34D0-36A1-4B1C-8446-DBEC4FF4ED82}" type="datetimeFigureOut">
               <a:rPr lang="en-IN" smtClean="0"/>
-              <a:t>19-02-2026</a:t>
+              <a:t>20-02-2026</a:t>
             </a:fld>
             <a:endParaRPr lang="en-IN"/>
           </a:p>
@@ -531,27 +531,6 @@
           <a:bodyPr/>
           <a:lstStyle/>
           <a:p>
-            <a:pPr lvl="1"/>
-            <a:r>
-              <a:rPr lang="en-US" dirty="0"/>
-              <a:t>Understood end-to-end development process</a:t>
-            </a:r>
-          </a:p>
-          <a:p>
-            <a:pPr lvl="1"/>
-            <a:r>
-              <a:rPr lang="en-US" dirty="0"/>
-              <a:t>Improved knowledge of Spring Boot and React</a:t>
-            </a:r>
-          </a:p>
-          <a:p>
-            <a:pPr lvl="1"/>
-            <a:r>
-              <a:rPr lang="en-US" dirty="0"/>
-              <a:t>Ready for feedback and suggestions</a:t>
-            </a:r>
-          </a:p>
-          <a:p>
             <a:endParaRPr lang="en-IN" dirty="0"/>
           </a:p>
         </p:txBody>
@@ -771,7 +750,7 @@
           <a:p>
             <a:fld id="{5BCAD085-E8A6-8845-BD4E-CB4CCA059FC4}" type="datetimeFigureOut">
               <a:rPr lang="en-US" smtClean="0"/>
-              <a:t>2/19/2026</a:t>
+              <a:t>2/20/2026</a:t>
             </a:fld>
             <a:endParaRPr lang="en-US"/>
           </a:p>
@@ -939,7 +918,7 @@
           <a:p>
             <a:fld id="{5BCAD085-E8A6-8845-BD4E-CB4CCA059FC4}" type="datetimeFigureOut">
               <a:rPr lang="en-US" smtClean="0"/>
-              <a:t>2/19/2026</a:t>
+              <a:t>2/20/2026</a:t>
             </a:fld>
             <a:endParaRPr lang="en-US"/>
           </a:p>
@@ -1117,7 +1096,7 @@
           <a:p>
             <a:fld id="{5BCAD085-E8A6-8845-BD4E-CB4CCA059FC4}" type="datetimeFigureOut">
               <a:rPr lang="en-US" smtClean="0"/>
-              <a:t>2/19/2026</a:t>
+              <a:t>2/20/2026</a:t>
             </a:fld>
             <a:endParaRPr lang="en-US"/>
           </a:p>
@@ -1285,7 +1264,7 @@
           <a:p>
             <a:fld id="{5BCAD085-E8A6-8845-BD4E-CB4CCA059FC4}" type="datetimeFigureOut">
               <a:rPr lang="en-US" smtClean="0"/>
-              <a:t>2/19/2026</a:t>
+              <a:t>2/20/2026</a:t>
             </a:fld>
             <a:endParaRPr lang="en-US"/>
           </a:p>
@@ -1530,7 +1509,7 @@
           <a:p>
             <a:fld id="{5BCAD085-E8A6-8845-BD4E-CB4CCA059FC4}" type="datetimeFigureOut">
               <a:rPr lang="en-US" smtClean="0"/>
-              <a:t>2/19/2026</a:t>
+              <a:t>2/20/2026</a:t>
             </a:fld>
             <a:endParaRPr lang="en-US"/>
           </a:p>
@@ -1815,7 +1794,7 @@
           <a:p>
             <a:fld id="{5BCAD085-E8A6-8845-BD4E-CB4CCA059FC4}" type="datetimeFigureOut">
               <a:rPr lang="en-US" smtClean="0"/>
-              <a:t>2/19/2026</a:t>
+              <a:t>2/20/2026</a:t>
             </a:fld>
             <a:endParaRPr lang="en-US"/>
           </a:p>
@@ -2234,7 +2213,7 @@
           <a:p>
             <a:fld id="{5BCAD085-E8A6-8845-BD4E-CB4CCA059FC4}" type="datetimeFigureOut">
               <a:rPr lang="en-US" smtClean="0"/>
-              <a:t>2/19/2026</a:t>
+              <a:t>2/20/2026</a:t>
             </a:fld>
             <a:endParaRPr lang="en-US"/>
           </a:p>
@@ -2351,7 +2330,7 @@
           <a:p>
             <a:fld id="{5BCAD085-E8A6-8845-BD4E-CB4CCA059FC4}" type="datetimeFigureOut">
               <a:rPr lang="en-US" smtClean="0"/>
-              <a:t>2/19/2026</a:t>
+              <a:t>2/20/2026</a:t>
             </a:fld>
             <a:endParaRPr lang="en-US"/>
           </a:p>
@@ -2446,7 +2425,7 @@
           <a:p>
             <a:fld id="{5BCAD085-E8A6-8845-BD4E-CB4CCA059FC4}" type="datetimeFigureOut">
               <a:rPr lang="en-US" smtClean="0"/>
-              <a:t>2/19/2026</a:t>
+              <a:t>2/20/2026</a:t>
             </a:fld>
             <a:endParaRPr lang="en-US"/>
           </a:p>
@@ -2721,7 +2700,7 @@
           <a:p>
             <a:fld id="{5BCAD085-E8A6-8845-BD4E-CB4CCA059FC4}" type="datetimeFigureOut">
               <a:rPr lang="en-US" smtClean="0"/>
-              <a:t>2/19/2026</a:t>
+              <a:t>2/20/2026</a:t>
             </a:fld>
             <a:endParaRPr lang="en-US"/>
           </a:p>
@@ -2973,7 +2952,7 @@
           <a:p>
             <a:fld id="{5BCAD085-E8A6-8845-BD4E-CB4CCA059FC4}" type="datetimeFigureOut">
               <a:rPr lang="en-US" smtClean="0"/>
-              <a:t>2/19/2026</a:t>
+              <a:t>2/20/2026</a:t>
             </a:fld>
             <a:endParaRPr lang="en-US"/>
           </a:p>
@@ -3184,7 +3163,7 @@
           <a:p>
             <a:fld id="{5BCAD085-E8A6-8845-BD4E-CB4CCA059FC4}" type="datetimeFigureOut">
               <a:rPr lang="en-US" smtClean="0"/>
-              <a:t>2/19/2026</a:t>
+              <a:t>2/20/2026</a:t>
             </a:fld>
             <a:endParaRPr lang="en-US"/>
           </a:p>
